--- a/rapports/septembre/FidMe_sept2026.pptx
+++ b/rapports/septembre/FidMe_sept2026.pptx
@@ -5651,7 +5651,7 @@
                 </a:solidFill>
                 <a:latin typeface="Arial"/>
               </a:rPr>
-              <a:t>MARQUES CITÉES</a:t>
+              <a:t>CATÉGORIES DE PRODUITS</a:t>
             </a:r>
           </a:p>
         </p:txBody>
@@ -5686,7 +5686,7 @@
                 </a:solidFill>
                 <a:latin typeface="Arial"/>
               </a:rPr>
-              <a:t>Part de voix dans les messages utilisateurs</a:t>
+              <a:t>Répartition des requêtes</a:t>
             </a:r>
           </a:p>
         </p:txBody>
@@ -5779,7 +5779,7 @@
         <p:spPr>
           <a:xfrm>
             <a:off x="8296656" y="4389120"/>
-            <a:ext cx="2072640" cy="152400"/>
+            <a:ext cx="2225040" cy="152400"/>
           </a:xfrm>
           <a:prstGeom prst="rect">
             <a:avLst/>
@@ -5800,7 +5800,7 @@
                 </a:solidFill>
                 <a:latin typeface="Arial"/>
               </a:rPr>
-              <a:t>Dealabs</a:t>
+              <a:t>Boissons</a:t>
             </a:r>
           </a:p>
         </p:txBody>
@@ -5858,7 +5858,7 @@
         <p:spPr>
           <a:xfrm>
             <a:off x="8296656" y="4657344"/>
-            <a:ext cx="2072640" cy="152400"/>
+            <a:ext cx="2225040" cy="152400"/>
           </a:xfrm>
           <a:prstGeom prst="rect">
             <a:avLst/>
@@ -5879,7 +5879,7 @@
                 </a:solidFill>
                 <a:latin typeface="Arial"/>
               </a:rPr>
-              <a:t>iGraal · 15 %</a:t>
+              <a:t>Produits frais et végétaux · 29 %</a:t>
             </a:r>
           </a:p>
         </p:txBody>
@@ -5937,7 +5937,7 @@
         <p:spPr>
           <a:xfrm>
             <a:off x="8296656" y="4925568"/>
-            <a:ext cx="2072640" cy="152400"/>
+            <a:ext cx="2225040" cy="152400"/>
           </a:xfrm>
           <a:prstGeom prst="rect">
             <a:avLst/>
@@ -5958,7 +5958,7 @@
                 </a:solidFill>
                 <a:latin typeface="Arial"/>
               </a:rPr>
-              <a:t>Google Wallet · 8 %</a:t>
+              <a:t>Épicerie et snacking · 15 %</a:t>
             </a:r>
           </a:p>
         </p:txBody>
@@ -6016,7 +6016,7 @@
         <p:spPr>
           <a:xfrm>
             <a:off x="8296656" y="5193792"/>
-            <a:ext cx="2072640" cy="152400"/>
+            <a:ext cx="2225040" cy="152400"/>
           </a:xfrm>
           <a:prstGeom prst="rect">
             <a:avLst/>
@@ -6037,7 +6037,7 @@
                 </a:solidFill>
                 <a:latin typeface="Arial"/>
               </a:rPr>
-              <a:t>Joko · 5 %</a:t>
+              <a:t>Cashback et coupons · 13 %</a:t>
             </a:r>
           </a:p>
         </p:txBody>
@@ -6095,7 +6095,7 @@
         <p:spPr>
           <a:xfrm>
             <a:off x="8296656" y="5462016"/>
-            <a:ext cx="2072640" cy="152400"/>
+            <a:ext cx="2225040" cy="152400"/>
           </a:xfrm>
           <a:prstGeom prst="rect">
             <a:avLst/>
@@ -6116,7 +6116,7 @@
                 </a:solidFill>
                 <a:latin typeface="Arial"/>
               </a:rPr>
-              <a:t>Poulpeo · 5 %</a:t>
+              <a:t>Alimentation pour animaux · 9 %</a:t>
             </a:r>
           </a:p>
         </p:txBody>
@@ -6174,7 +6174,7 @@
         <p:spPr>
           <a:xfrm>
             <a:off x="8296656" y="5730240"/>
-            <a:ext cx="2072640" cy="152400"/>
+            <a:ext cx="2225040" cy="152400"/>
           </a:xfrm>
           <a:prstGeom prst="rect">
             <a:avLst/>
@@ -6195,7 +6195,7 @@
                 </a:solidFill>
                 <a:latin typeface="Arial"/>
               </a:rPr>
-              <a:t>Autres (dont FidMe 0,7 %) · 13 %</a:t>
+              <a:t>Hygiène, entretien et bébé · 1 %</a:t>
             </a:r>
           </a:p>
         </p:txBody>
@@ -6209,7 +6209,7 @@
         <p:spPr>
           <a:xfrm>
             <a:off x="10564368" y="4450080"/>
-            <a:ext cx="475488" cy="724204"/>
+            <a:ext cx="475488" cy="442569"/>
           </a:xfrm>
           <a:prstGeom prst="rect">
             <a:avLst/>
@@ -6253,7 +6253,7 @@
         <p:spPr>
           <a:xfrm>
             <a:off x="10564368" y="4450080"/>
-            <a:ext cx="475488" cy="724204"/>
+            <a:ext cx="475488" cy="442569"/>
           </a:xfrm>
           <a:prstGeom prst="rect">
             <a:avLst/>
@@ -6274,7 +6274,7 @@
                 </a:solidFill>
                 <a:latin typeface="Arial"/>
               </a:rPr>
-              <a:t>54 %</a:t>
+              <a:t>33 %</a:t>
             </a:r>
           </a:p>
         </p:txBody>
@@ -6287,8 +6287,8 @@
         </p:nvSpPr>
         <p:spPr>
           <a:xfrm>
-            <a:off x="10564368" y="5174284"/>
-            <a:ext cx="475488" cy="201168"/>
+            <a:off x="10564368" y="4892649"/>
+            <a:ext cx="475488" cy="388924"/>
           </a:xfrm>
           <a:prstGeom prst="rect">
             <a:avLst/>
@@ -6325,14 +6325,49 @@
       </p:sp>
       <p:sp>
         <p:nvSpPr>
-          <p:cNvPr id="83" name="Rectangle 82"/>
+          <p:cNvPr id="83" name="TextBox 82"/>
+          <p:cNvSpPr txBox="1"/>
+          <p:nvPr/>
+        </p:nvSpPr>
+        <p:spPr>
+          <a:xfrm>
+            <a:off x="10564368" y="4892649"/>
+            <a:ext cx="475488" cy="388924"/>
+          </a:xfrm>
+          <a:prstGeom prst="rect">
+            <a:avLst/>
+          </a:prstGeom>
+          <a:noFill/>
+        </p:spPr>
+        <p:txBody>
+          <a:bodyPr wrap="square" anchor="ctr" lIns="0" rIns="0" tIns="0" bIns="0">
+            <a:spAutoFit/>
+          </a:bodyPr>
+          <a:lstStyle/>
+          <a:p>
+            <a:pPr algn="ctr"/>
+            <a:r>
+              <a:rPr sz="1000" b="1" i="0">
+                <a:solidFill>
+                  <a:srgbClr val="FFFFFF"/>
+                </a:solidFill>
+                <a:latin typeface="Arial"/>
+              </a:rPr>
+              <a:t>29 %</a:t>
+            </a:r>
+          </a:p>
+        </p:txBody>
+      </p:sp>
+      <p:sp>
+        <p:nvSpPr>
+          <p:cNvPr id="84" name="Rectangle 83"/>
           <p:cNvSpPr/>
           <p:nvPr/>
         </p:nvSpPr>
         <p:spPr>
           <a:xfrm>
-            <a:off x="10564368" y="5375452"/>
-            <a:ext cx="475488" cy="107289"/>
+            <a:off x="10564368" y="5281574"/>
+            <a:ext cx="475488" cy="201168"/>
           </a:xfrm>
           <a:prstGeom prst="rect">
             <a:avLst/>
@@ -6369,14 +6404,14 @@
       </p:sp>
       <p:sp>
         <p:nvSpPr>
-          <p:cNvPr id="84" name="Rectangle 83"/>
+          <p:cNvPr id="85" name="Rectangle 84"/>
           <p:cNvSpPr/>
           <p:nvPr/>
         </p:nvSpPr>
         <p:spPr>
           <a:xfrm>
             <a:off x="10564368" y="5482742"/>
-            <a:ext cx="475488" cy="67056"/>
+            <a:ext cx="475488" cy="174345"/>
           </a:xfrm>
           <a:prstGeom prst="rect">
             <a:avLst/>
@@ -6413,14 +6448,14 @@
       </p:sp>
       <p:sp>
         <p:nvSpPr>
-          <p:cNvPr id="85" name="Rectangle 84"/>
+          <p:cNvPr id="86" name="Rectangle 85"/>
           <p:cNvSpPr/>
           <p:nvPr/>
         </p:nvSpPr>
         <p:spPr>
           <a:xfrm>
-            <a:off x="10564368" y="5549798"/>
-            <a:ext cx="475488" cy="67056"/>
+            <a:off x="10564368" y="5657088"/>
+            <a:ext cx="475488" cy="120700"/>
           </a:xfrm>
           <a:prstGeom prst="rect">
             <a:avLst/>
@@ -6457,14 +6492,14 @@
       </p:sp>
       <p:sp>
         <p:nvSpPr>
-          <p:cNvPr id="86" name="Rectangle 85"/>
+          <p:cNvPr id="87" name="Rectangle 86"/>
           <p:cNvSpPr/>
           <p:nvPr/>
         </p:nvSpPr>
         <p:spPr>
           <a:xfrm>
-            <a:off x="10564368" y="5616854"/>
-            <a:ext cx="475488" cy="174345"/>
+            <a:off x="10564368" y="5777788"/>
+            <a:ext cx="475488" cy="13411"/>
           </a:xfrm>
           <a:prstGeom prst="rect">
             <a:avLst/>

--- a/rapports/septembre/FidMe_sept2026.pptx
+++ b/rapports/septembre/FidMe_sept2026.pptx
@@ -5800,7 +5800,7 @@
                 </a:solidFill>
                 <a:latin typeface="Arial"/>
               </a:rPr>
-              <a:t>Boissons</a:t>
+              <a:t>Boissons · 24 %</a:t>
             </a:r>
           </a:p>
         </p:txBody>
@@ -5879,7 +5879,7 @@
                 </a:solidFill>
                 <a:latin typeface="Arial"/>
               </a:rPr>
-              <a:t>Produits frais et végétaux · 29 %</a:t>
+              <a:t>Produits frais et végétaux · 17 %</a:t>
             </a:r>
           </a:p>
         </p:txBody>
@@ -5958,7 +5958,7 @@
                 </a:solidFill>
                 <a:latin typeface="Arial"/>
               </a:rPr>
-              <a:t>Épicerie et snacking · 15 %</a:t>
+              <a:t>Épicerie et snacking · 18 %</a:t>
             </a:r>
           </a:p>
         </p:txBody>
@@ -6116,7 +6116,7 @@
                 </a:solidFill>
                 <a:latin typeface="Arial"/>
               </a:rPr>
-              <a:t>Alimentation pour animaux · 9 %</a:t>
+              <a:t>Alimentation pour animaux · 4 %</a:t>
             </a:r>
           </a:p>
         </p:txBody>
@@ -6195,7 +6195,7 @@
                 </a:solidFill>
                 <a:latin typeface="Arial"/>
               </a:rPr>
-              <a:t>Hygiène, entretien et bébé · 1 %</a:t>
+              <a:t>Hygiène, entretien et bébé · 24 %</a:t>
             </a:r>
           </a:p>
         </p:txBody>
@@ -6209,7 +6209,7 @@
         <p:spPr>
           <a:xfrm>
             <a:off x="10564368" y="4450080"/>
-            <a:ext cx="475488" cy="442569"/>
+            <a:ext cx="475488" cy="321868"/>
           </a:xfrm>
           <a:prstGeom prst="rect">
             <a:avLst/>
@@ -6246,49 +6246,14 @@
       </p:sp>
       <p:sp>
         <p:nvSpPr>
-          <p:cNvPr id="81" name="TextBox 80"/>
-          <p:cNvSpPr txBox="1"/>
-          <p:nvPr/>
-        </p:nvSpPr>
-        <p:spPr>
-          <a:xfrm>
-            <a:off x="10564368" y="4450080"/>
-            <a:ext cx="475488" cy="442569"/>
-          </a:xfrm>
-          <a:prstGeom prst="rect">
-            <a:avLst/>
-          </a:prstGeom>
-          <a:noFill/>
-        </p:spPr>
-        <p:txBody>
-          <a:bodyPr wrap="square" anchor="ctr" lIns="0" rIns="0" tIns="0" bIns="0">
-            <a:spAutoFit/>
-          </a:bodyPr>
-          <a:lstStyle/>
-          <a:p>
-            <a:pPr algn="ctr"/>
-            <a:r>
-              <a:rPr sz="1000" b="1" i="0">
-                <a:solidFill>
-                  <a:srgbClr val="FFFFFF"/>
-                </a:solidFill>
-                <a:latin typeface="Arial"/>
-              </a:rPr>
-              <a:t>33 %</a:t>
-            </a:r>
-          </a:p>
-        </p:txBody>
-      </p:sp>
-      <p:sp>
-        <p:nvSpPr>
-          <p:cNvPr id="82" name="Rectangle 81"/>
+          <p:cNvPr id="81" name="Rectangle 80"/>
           <p:cNvSpPr/>
           <p:nvPr/>
         </p:nvSpPr>
         <p:spPr>
           <a:xfrm>
-            <a:off x="10564368" y="4892649"/>
-            <a:ext cx="475488" cy="388924"/>
+            <a:off x="10564368" y="4771948"/>
+            <a:ext cx="475488" cy="227990"/>
           </a:xfrm>
           <a:prstGeom prst="rect">
             <a:avLst/>
@@ -6325,49 +6290,14 @@
       </p:sp>
       <p:sp>
         <p:nvSpPr>
-          <p:cNvPr id="83" name="TextBox 82"/>
-          <p:cNvSpPr txBox="1"/>
-          <p:nvPr/>
-        </p:nvSpPr>
-        <p:spPr>
-          <a:xfrm>
-            <a:off x="10564368" y="4892649"/>
-            <a:ext cx="475488" cy="388924"/>
-          </a:xfrm>
-          <a:prstGeom prst="rect">
-            <a:avLst/>
-          </a:prstGeom>
-          <a:noFill/>
-        </p:spPr>
-        <p:txBody>
-          <a:bodyPr wrap="square" anchor="ctr" lIns="0" rIns="0" tIns="0" bIns="0">
-            <a:spAutoFit/>
-          </a:bodyPr>
-          <a:lstStyle/>
-          <a:p>
-            <a:pPr algn="ctr"/>
-            <a:r>
-              <a:rPr sz="1000" b="1" i="0">
-                <a:solidFill>
-                  <a:srgbClr val="FFFFFF"/>
-                </a:solidFill>
-                <a:latin typeface="Arial"/>
-              </a:rPr>
-              <a:t>29 %</a:t>
-            </a:r>
-          </a:p>
-        </p:txBody>
-      </p:sp>
-      <p:sp>
-        <p:nvSpPr>
-          <p:cNvPr id="84" name="Rectangle 83"/>
+          <p:cNvPr id="82" name="Rectangle 81"/>
           <p:cNvSpPr/>
           <p:nvPr/>
         </p:nvSpPr>
         <p:spPr>
           <a:xfrm>
-            <a:off x="10564368" y="5281574"/>
-            <a:ext cx="475488" cy="201168"/>
+            <a:off x="10564368" y="4999939"/>
+            <a:ext cx="475488" cy="241401"/>
           </a:xfrm>
           <a:prstGeom prst="rect">
             <a:avLst/>
@@ -6404,13 +6334,13 @@
       </p:sp>
       <p:sp>
         <p:nvSpPr>
-          <p:cNvPr id="85" name="Rectangle 84"/>
+          <p:cNvPr id="83" name="Rectangle 82"/>
           <p:cNvSpPr/>
           <p:nvPr/>
         </p:nvSpPr>
         <p:spPr>
           <a:xfrm>
-            <a:off x="10564368" y="5482742"/>
+            <a:off x="10564368" y="5241340"/>
             <a:ext cx="475488" cy="174345"/>
           </a:xfrm>
           <a:prstGeom prst="rect">
@@ -6448,14 +6378,14 @@
       </p:sp>
       <p:sp>
         <p:nvSpPr>
-          <p:cNvPr id="86" name="Rectangle 85"/>
+          <p:cNvPr id="84" name="Rectangle 83"/>
           <p:cNvSpPr/>
           <p:nvPr/>
         </p:nvSpPr>
         <p:spPr>
           <a:xfrm>
-            <a:off x="10564368" y="5657088"/>
-            <a:ext cx="475488" cy="120700"/>
+            <a:off x="10564368" y="5415686"/>
+            <a:ext cx="475488" cy="53644"/>
           </a:xfrm>
           <a:prstGeom prst="rect">
             <a:avLst/>
@@ -6492,14 +6422,14 @@
       </p:sp>
       <p:sp>
         <p:nvSpPr>
-          <p:cNvPr id="87" name="Rectangle 86"/>
+          <p:cNvPr id="85" name="Rectangle 84"/>
           <p:cNvSpPr/>
           <p:nvPr/>
         </p:nvSpPr>
         <p:spPr>
           <a:xfrm>
-            <a:off x="10564368" y="5777788"/>
-            <a:ext cx="475488" cy="13411"/>
+            <a:off x="10564368" y="5469331"/>
+            <a:ext cx="475488" cy="321868"/>
           </a:xfrm>
           <a:prstGeom prst="rect">
             <a:avLst/>
@@ -6935,7 +6865,7 @@
                 </a:solidFill>
                 <a:latin typeface="Arial"/>
               </a:rPr>
-              <a:t>Profiter des achats cadeaux</a:t>
+              <a:t>Les offres concrètes cliquent le mieux</a:t>
             </a:r>
           </a:p>
         </p:txBody>
@@ -6970,7 +6900,7 @@
                 </a:solidFill>
                 <a:latin typeface="Arial"/>
               </a:rPr>
-              <a:t>Le cadeau déclenche 95,6 % des conversations du secteur, avec LEGO en tête des marques citées.</a:t>
+              <a:t>L'offre « 2 € pour l'achat d'un pack STABILO » atteint 2,07 fois le CTR moyen.</a:t>
             </a:r>
           </a:p>
         </p:txBody>
@@ -7005,7 +6935,7 @@
                 </a:solidFill>
                 <a:latin typeface="Arial"/>
               </a:rPr>
-              <a:t>→  Mettre en avant les réductions et cartes de fidélité utiles pour les achats cadeaux, en vue de Noël.</a:t>
+              <a:t>→  Mettre le montant remboursé dans le titre de l'annonce.</a:t>
             </a:r>
           </a:p>
         </p:txBody>
@@ -7121,7 +7051,7 @@
                 </a:solidFill>
                 <a:latin typeface="Arial"/>
               </a:rPr>
-              <a:t>Sortir de l'ombre des sites de bons plans</a:t>
+              <a:t>Les vins et les gourmandises surperforment</a:t>
             </a:r>
           </a:p>
         </p:txBody>
@@ -7156,7 +7086,7 @@
                 </a:solidFill>
                 <a:latin typeface="Arial"/>
               </a:rPr>
-              <a:t>FidMe ne pèse que 0,7 % de part de voix (−1,0 pt), loin de Dealabs (53,8 %) et iGraal (15,3 %).</a:t>
+              <a:t>Les vins (1,28 fois), les snacks et confiseries (1,19 fois) et les boissons (1,18 fois) dépassent la moyenne.</a:t>
             </a:r>
           </a:p>
         </p:txBody>
@@ -7191,7 +7121,7 @@
                 </a:solidFill>
                 <a:latin typeface="Arial"/>
               </a:rPr>
-              <a:t>→  Positionner FidMe comme l'appli qui réunit cartes de fidélité, offres et cashback en un seul endroit.</a:t>
+              <a:t>→  Donner plus de place aux vins et gourmandises à l'approche des fêtes.</a:t>
             </a:r>
           </a:p>
         </p:txBody>
@@ -7307,7 +7237,7 @@
                 </a:solidFill>
                 <a:latin typeface="Arial"/>
               </a:rPr>
-              <a:t>Une recommandation spontanée qui émerge</a:t>
+              <a:t>Revoir le végétal, le bébé et l'animalerie</a:t>
             </a:r>
           </a:p>
         </p:txBody>
@@ -7342,7 +7272,7 @@
                 </a:solidFill>
                 <a:latin typeface="Arial"/>
               </a:rPr>
-              <a:t>Les IA citent spontanément FidMe dans 5,1 % de leurs recommandations (+5,1 pts), au niveau d'iGraal. La part de voix ads recule à 15,4 % (−10,0 pts).</a:t>
+              <a:t>Les boissons végétales Bjorg (0,56 fois), Le Gaulois Végétal (0,60 fois), Blédichef (0,64 fois) et Whiskas (0,70 fois) restent sous la moyenne.</a:t>
             </a:r>
           </a:p>
         </p:txBody>
@@ -7377,7 +7307,7 @@
                 </a:solidFill>
                 <a:latin typeface="Arial"/>
               </a:rPr>
-              <a:t>→  Regagner de la couverture ads sur les topics fidélité et wallet pour accompagner cette progression.</a:t>
+              <a:t>→  Tester des accroches centrées sur l'économie réalisée.</a:t>
             </a:r>
           </a:p>
         </p:txBody>
@@ -7528,7 +7458,7 @@
                 </a:solidFill>
                 <a:latin typeface="Arial"/>
               </a:rPr>
-              <a:t>Les clics passent de 1 378 à 3 086 pour 16 % d'impressions en plus. Le CTR passe de 0,23 % à 0,44 %.</a:t>
+              <a:t>Les clics passent de 1 378 à 3 086. Le CTR passe de 0,23 % à 0,44 %. WaterWipes représente 16 % de la diffusion.</a:t>
             </a:r>
           </a:p>
         </p:txBody>
@@ -7563,7 +7493,7 @@
                 </a:solidFill>
                 <a:latin typeface="Arial"/>
               </a:rPr>
-              <a:t>→  Poursuivre sur les accroches qui performent et décliner un message « cadeaux de fin d'année ».</a:t>
+              <a:t>→  Poursuivre sur les offres qui performent et préparer les offres de Noël.</a:t>
             </a:r>
           </a:p>
         </p:txBody>
